--- a/Presrnt/Доклад_Тестирование_ПО_и_стандарты_документации.pptx
+++ b/Presrnt/Доклад_Тестирование_ПО_и_стандарты_документации.pptx
@@ -17,7 +17,6 @@
     <p:sldId id="265" r:id="rId11"/>
     <p:sldId id="266" r:id="rId12"/>
     <p:sldId id="267" r:id="rId13"/>
-    <p:sldId id="268" r:id="rId14"/>
   </p:sldIdLst>
   <p:sldSz cx="12192000" cy="6858000"/>
   <p:notesSz cx="6858000" cy="9144000"/>
@@ -135,6 +134,27 @@
 </p:presentation>
 </file>
 
+<file path=ppt/changesInfos/changesInfo1.xml><?xml version="1.0" encoding="utf-8"?>
+<pc:chgInfo xmlns:a="http://schemas.openxmlformats.org/drawingml/2006/main" xmlns:r="http://schemas.openxmlformats.org/officeDocument/2006/relationships" xmlns:ac="http://schemas.microsoft.com/office/drawing/2013/main/command" xmlns:pc="http://schemas.microsoft.com/office/powerpoint/2013/main/command">
+  <pc:docChgLst>
+    <pc:chgData name="Артём Романович" userId="e984cf734315569e" providerId="LiveId" clId="{03702C5D-4C9C-4A44-84FC-D0D072532A48}"/>
+    <pc:docChg chg="delSld">
+      <pc:chgData name="Артём Романович" userId="e984cf734315569e" providerId="LiveId" clId="{03702C5D-4C9C-4A44-84FC-D0D072532A48}" dt="2026-10-11T13:30:35.595" v="0" actId="2696"/>
+      <pc:docMkLst>
+        <pc:docMk/>
+      </pc:docMkLst>
+      <pc:sldChg chg="del">
+        <pc:chgData name="Артём Романович" userId="e984cf734315569e" providerId="LiveId" clId="{03702C5D-4C9C-4A44-84FC-D0D072532A48}" dt="2026-10-11T13:30:35.595" v="0" actId="2696"/>
+        <pc:sldMkLst>
+          <pc:docMk/>
+          <pc:sldMk cId="0" sldId="268"/>
+        </pc:sldMkLst>
+      </pc:sldChg>
+    </pc:docChg>
+  </pc:docChgLst>
+</pc:chgInfo>
+</file>
+
 <file path=ppt/slideLayouts/slideLayout1.xml><?xml version="1.0" encoding="utf-8"?>
 <p:sldLayout xmlns:a="http://schemas.openxmlformats.org/drawingml/2006/main" xmlns:r="http://schemas.openxmlformats.org/officeDocument/2006/relationships" xmlns:p="http://schemas.openxmlformats.org/presentationml/2006/main" type="title" preserve="1">
   <p:cSld name="Title Slide">
@@ -6108,480 +6128,6 @@
             </a:pPr>
             <a:r>
               <a:t>Качество создаётся на всех этапах разработки, а не только перед выпуском программы.</a:t>
-            </a:r>
-          </a:p>
-        </p:txBody>
-      </p:sp>
-    </p:spTree>
-  </p:cSld>
-  <p:clrMapOvr>
-    <a:masterClrMapping/>
-  </p:clrMapOvr>
-</p:sld>
-</file>
-
-<file path=ppt/slides/slide13.xml><?xml version="1.0" encoding="utf-8"?>
-<p:sld xmlns:a="http://schemas.openxmlformats.org/drawingml/2006/main" xmlns:r="http://schemas.openxmlformats.org/officeDocument/2006/relationships" xmlns:p="http://schemas.openxmlformats.org/presentationml/2006/main">
-  <p:cSld>
-    <p:bg>
-      <p:bgPr>
-        <a:solidFill>
-          <a:srgbClr val="F4F7FB"/>
-        </a:solidFill>
-        <a:effectLst/>
-      </p:bgPr>
-    </p:bg>
-    <p:spTree>
-      <p:nvGrpSpPr>
-        <p:cNvPr id="1" name=""/>
-        <p:cNvGrpSpPr/>
-        <p:nvPr/>
-      </p:nvGrpSpPr>
-      <p:grpSpPr>
-        <a:xfrm>
-          <a:off x="0" y="0"/>
-          <a:ext cx="0" cy="0"/>
-          <a:chOff x="0" y="0"/>
-          <a:chExt cx="0" cy="0"/>
-        </a:xfrm>
-      </p:grpSpPr>
-      <p:sp>
-        <p:nvSpPr>
-          <p:cNvPr id="2" name="Rectangle 1"/>
-          <p:cNvSpPr/>
-          <p:nvPr/>
-        </p:nvSpPr>
-        <p:spPr>
-          <a:xfrm>
-            <a:off x="0" y="0"/>
-            <a:ext cx="12191695" cy="109728"/>
-          </a:xfrm>
-          <a:prstGeom prst="rect">
-            <a:avLst/>
-          </a:prstGeom>
-          <a:solidFill>
-            <a:srgbClr val="239B91"/>
-          </a:solidFill>
-          <a:ln>
-            <a:noFill/>
-          </a:ln>
-        </p:spPr>
-        <p:style>
-          <a:lnRef idx="1">
-            <a:schemeClr val="accent1"/>
-          </a:lnRef>
-          <a:fillRef idx="3">
-            <a:schemeClr val="accent1"/>
-          </a:fillRef>
-          <a:effectRef idx="2">
-            <a:schemeClr val="accent1"/>
-          </a:effectRef>
-          <a:fontRef idx="minor">
-            <a:schemeClr val="lt1"/>
-          </a:fontRef>
-        </p:style>
-        <p:txBody>
-          <a:bodyPr rtlCol="0" anchor="ctr"/>
-          <a:lstStyle/>
-          <a:p>
-            <a:pPr algn="ctr"/>
-            <a:endParaRPr/>
-          </a:p>
-        </p:txBody>
-      </p:sp>
-      <p:sp>
-        <p:nvSpPr>
-          <p:cNvPr id="3" name="TextBox 2"/>
-          <p:cNvSpPr txBox="1"/>
-          <p:nvPr/>
-        </p:nvSpPr>
-        <p:spPr>
-          <a:xfrm>
-            <a:off x="640080" y="384048"/>
-            <a:ext cx="10881360" cy="685800"/>
-          </a:xfrm>
-          <a:prstGeom prst="rect">
-            <a:avLst/>
-          </a:prstGeom>
-          <a:noFill/>
-        </p:spPr>
-        <p:txBody>
-          <a:bodyPr wrap="none">
-            <a:spAutoFit/>
-          </a:bodyPr>
-          <a:lstStyle/>
-          <a:p>
-            <a:pPr>
-              <a:defRPr sz="2900" b="1">
-                <a:solidFill>
-                  <a:srgbClr val="16243E"/>
-                </a:solidFill>
-                <a:latin typeface="Aptos Display"/>
-              </a:defRPr>
-            </a:pPr>
-            <a:r>
-              <a:t>Источники</a:t>
-            </a:r>
-          </a:p>
-        </p:txBody>
-      </p:sp>
-      <p:sp>
-        <p:nvSpPr>
-          <p:cNvPr id="4" name="TextBox 3"/>
-          <p:cNvSpPr txBox="1"/>
-          <p:nvPr/>
-        </p:nvSpPr>
-        <p:spPr>
-          <a:xfrm>
-            <a:off x="658368" y="1024128"/>
-            <a:ext cx="10698480" cy="274320"/>
-          </a:xfrm>
-          <a:prstGeom prst="rect">
-            <a:avLst/>
-          </a:prstGeom>
-          <a:noFill/>
-        </p:spPr>
-        <p:txBody>
-          <a:bodyPr wrap="none">
-            <a:spAutoFit/>
-          </a:bodyPr>
-          <a:lstStyle/>
-          <a:p>
-            <a:pPr>
-              <a:defRPr sz="900" b="1">
-                <a:solidFill>
-                  <a:srgbClr val="239B91"/>
-                </a:solidFill>
-                <a:latin typeface="Aptos"/>
-              </a:defRPr>
-            </a:pPr>
-            <a:r>
-              <a:t>МАТЕРИАЛЫ ДЛЯ ПОДГОТОВКИ</a:t>
-            </a:r>
-          </a:p>
-        </p:txBody>
-      </p:sp>
-      <p:sp>
-        <p:nvSpPr>
-          <p:cNvPr id="5" name="Rectangle 4"/>
-          <p:cNvSpPr/>
-          <p:nvPr/>
-        </p:nvSpPr>
-        <p:spPr>
-          <a:xfrm>
-            <a:off x="640080" y="6473952"/>
-            <a:ext cx="10927080" cy="13716"/>
-          </a:xfrm>
-          <a:prstGeom prst="rect">
-            <a:avLst/>
-          </a:prstGeom>
-          <a:solidFill>
-            <a:srgbClr val="DCE2EA"/>
-          </a:solidFill>
-          <a:ln>
-            <a:noFill/>
-          </a:ln>
-        </p:spPr>
-        <p:style>
-          <a:lnRef idx="1">
-            <a:schemeClr val="accent1"/>
-          </a:lnRef>
-          <a:fillRef idx="3">
-            <a:schemeClr val="accent1"/>
-          </a:fillRef>
-          <a:effectRef idx="2">
-            <a:schemeClr val="accent1"/>
-          </a:effectRef>
-          <a:fontRef idx="minor">
-            <a:schemeClr val="lt1"/>
-          </a:fontRef>
-        </p:style>
-        <p:txBody>
-          <a:bodyPr rtlCol="0" anchor="ctr"/>
-          <a:lstStyle/>
-          <a:p>
-            <a:pPr algn="ctr"/>
-            <a:endParaRPr/>
-          </a:p>
-        </p:txBody>
-      </p:sp>
-      <p:sp>
-        <p:nvSpPr>
-          <p:cNvPr id="6" name="TextBox 5"/>
-          <p:cNvSpPr txBox="1"/>
-          <p:nvPr/>
-        </p:nvSpPr>
-        <p:spPr>
-          <a:xfrm>
-            <a:off x="658368" y="6510528"/>
-            <a:ext cx="10789920" cy="201168"/>
-          </a:xfrm>
-          <a:prstGeom prst="rect">
-            <a:avLst/>
-          </a:prstGeom>
-          <a:noFill/>
-        </p:spPr>
-        <p:txBody>
-          <a:bodyPr wrap="none">
-            <a:spAutoFit/>
-          </a:bodyPr>
-          <a:lstStyle/>
-          <a:p>
-            <a:pPr>
-              <a:defRPr sz="800">
-                <a:solidFill>
-                  <a:srgbClr val="606C7C"/>
-                </a:solidFill>
-                <a:latin typeface="Aptos"/>
-              </a:defRPr>
-            </a:pPr>
-            <a:r>
-              <a:t>Тестирование ПО • Качество программной документации</a:t>
-            </a:r>
-          </a:p>
-          <a:p>
-            <a:pPr algn="r">
-              <a:defRPr sz="800">
-                <a:solidFill>
-                  <a:srgbClr val="606C7C"/>
-                </a:solidFill>
-                <a:latin typeface="Aptos"/>
-              </a:defRPr>
-            </a:pPr>
-            <a:r>
-              <a:t>13</a:t>
-            </a:r>
-          </a:p>
-        </p:txBody>
-      </p:sp>
-      <p:sp>
-        <p:nvSpPr>
-          <p:cNvPr id="7" name="TextBox 6"/>
-          <p:cNvSpPr txBox="1"/>
-          <p:nvPr/>
-        </p:nvSpPr>
-        <p:spPr>
-          <a:xfrm>
-            <a:off x="868680" y="1645920"/>
-            <a:ext cx="10515600" cy="4206240"/>
-          </a:xfrm>
-          <a:prstGeom prst="rect">
-            <a:avLst/>
-          </a:prstGeom>
-          <a:noFill/>
-        </p:spPr>
-        <p:txBody>
-          <a:bodyPr wrap="square" lIns="73152" tIns="54864" rIns="73152">
-            <a:spAutoFit/>
-          </a:bodyPr>
-          <a:lstStyle/>
-          <a:p>
-            <a:pPr>
-              <a:spcAft>
-                <a:spcPts val="1800"/>
-              </a:spcAft>
-              <a:defRPr sz="1800">
-                <a:solidFill>
-                  <a:srgbClr val="26303E"/>
-                </a:solidFill>
-                <a:latin typeface="Aptos"/>
-              </a:defRPr>
-            </a:pPr>
-            <a:r>
-              <a:t>Видео по теме: https://youtu.be/5-jZ9Da7h6Q</a:t>
-            </a:r>
-          </a:p>
-          <a:p>
-            <a:pPr>
-              <a:spcAft>
-                <a:spcPts val="1800"/>
-              </a:spcAft>
-              <a:defRPr sz="1800">
-                <a:solidFill>
-                  <a:srgbClr val="26303E"/>
-                </a:solidFill>
-                <a:latin typeface="Aptos"/>
-              </a:defRPr>
-            </a:pPr>
-            <a:r>
-              <a:t>ГОСТ Р 56920-2024 — общие положения тестирования ПО.</a:t>
-            </a:r>
-          </a:p>
-          <a:p>
-            <a:pPr>
-              <a:spcAft>
-                <a:spcPts val="1800"/>
-              </a:spcAft>
-              <a:defRPr sz="1800">
-                <a:solidFill>
-                  <a:srgbClr val="26303E"/>
-                </a:solidFill>
-                <a:latin typeface="Aptos"/>
-              </a:defRPr>
-            </a:pPr>
-            <a:r>
-              <a:t>Серия ISO/IEC 25000 (SQuaRE) — требования и оценка качества ПО.</a:t>
-            </a:r>
-          </a:p>
-          <a:p>
-            <a:pPr>
-              <a:spcAft>
-                <a:spcPts val="1800"/>
-              </a:spcAft>
-              <a:defRPr sz="1800">
-                <a:solidFill>
-                  <a:srgbClr val="26303E"/>
-                </a:solidFill>
-                <a:latin typeface="Aptos"/>
-              </a:defRPr>
-            </a:pPr>
-            <a:r>
-              <a:t>ГОСТ 19.101-77, ГОСТ 19.102-77, ГОСТ 19.103-77, ГОСТ 19.105-78, ГОСТ 19.201-78 — стандарты ЕСПД.</a:t>
-            </a:r>
-          </a:p>
-        </p:txBody>
-      </p:sp>
-      <p:sp>
-        <p:nvSpPr>
-          <p:cNvPr id="8" name="Rounded Rectangle 7"/>
-          <p:cNvSpPr/>
-          <p:nvPr/>
-        </p:nvSpPr>
-        <p:spPr>
-          <a:xfrm>
-            <a:off x="914400" y="5440680"/>
-            <a:ext cx="10241280" cy="594360"/>
-          </a:xfrm>
-          <a:prstGeom prst="roundRect">
-            <a:avLst/>
-          </a:prstGeom>
-          <a:solidFill>
-            <a:srgbClr val="FFFFFF"/>
-          </a:solidFill>
-          <a:ln>
-            <a:solidFill>
-              <a:srgbClr val="E2E8F0"/>
-            </a:solidFill>
-          </a:ln>
-        </p:spPr>
-        <p:style>
-          <a:lnRef idx="1">
-            <a:schemeClr val="accent1"/>
-          </a:lnRef>
-          <a:fillRef idx="3">
-            <a:schemeClr val="accent1"/>
-          </a:fillRef>
-          <a:effectRef idx="2">
-            <a:schemeClr val="accent1"/>
-          </a:effectRef>
-          <a:fontRef idx="minor">
-            <a:schemeClr val="lt1"/>
-          </a:fontRef>
-        </p:style>
-        <p:txBody>
-          <a:bodyPr rtlCol="0" anchor="ctr"/>
-          <a:lstStyle/>
-          <a:p>
-            <a:pPr algn="ctr"/>
-            <a:endParaRPr/>
-          </a:p>
-        </p:txBody>
-      </p:sp>
-      <p:sp>
-        <p:nvSpPr>
-          <p:cNvPr id="9" name="Rectangle 8"/>
-          <p:cNvSpPr/>
-          <p:nvPr/>
-        </p:nvSpPr>
-        <p:spPr>
-          <a:xfrm>
-            <a:off x="914400" y="5440680"/>
-            <a:ext cx="82296" cy="594360"/>
-          </a:xfrm>
-          <a:prstGeom prst="rect">
-            <a:avLst/>
-          </a:prstGeom>
-          <a:solidFill>
-            <a:srgbClr val="239B91"/>
-          </a:solidFill>
-          <a:ln>
-            <a:noFill/>
-          </a:ln>
-        </p:spPr>
-        <p:style>
-          <a:lnRef idx="1">
-            <a:schemeClr val="accent1"/>
-          </a:lnRef>
-          <a:fillRef idx="3">
-            <a:schemeClr val="accent1"/>
-          </a:fillRef>
-          <a:effectRef idx="2">
-            <a:schemeClr val="accent1"/>
-          </a:effectRef>
-          <a:fontRef idx="minor">
-            <a:schemeClr val="lt1"/>
-          </a:fontRef>
-        </p:style>
-        <p:txBody>
-          <a:bodyPr rtlCol="0" anchor="ctr"/>
-          <a:lstStyle/>
-          <a:p>
-            <a:pPr algn="ctr"/>
-            <a:endParaRPr/>
-          </a:p>
-        </p:txBody>
-      </p:sp>
-      <p:sp>
-        <p:nvSpPr>
-          <p:cNvPr id="10" name="TextBox 9"/>
-          <p:cNvSpPr txBox="1"/>
-          <p:nvPr/>
-        </p:nvSpPr>
-        <p:spPr>
-          <a:xfrm>
-            <a:off x="1143000" y="5623560"/>
-            <a:ext cx="9829800" cy="320040"/>
-          </a:xfrm>
-          <a:prstGeom prst="rect">
-            <a:avLst/>
-          </a:prstGeom>
-          <a:noFill/>
-        </p:spPr>
-        <p:txBody>
-          <a:bodyPr wrap="square" lIns="0" rIns="0">
-            <a:spAutoFit/>
-          </a:bodyPr>
-          <a:lstStyle/>
-          <a:p>
-            <a:pPr>
-              <a:spcAft>
-                <a:spcPts val="800"/>
-              </a:spcAft>
-              <a:defRPr sz="1300" b="1">
-                <a:solidFill>
-                  <a:srgbClr val="16243E"/>
-                </a:solidFill>
-                <a:latin typeface="Aptos Display"/>
-              </a:defRPr>
-            </a:pPr>
-            <a:r>
-              <a:t>Перед сдачей</a:t>
-            </a:r>
-          </a:p>
-          <a:p>
-            <a:pPr>
-              <a:spcAft>
-                <a:spcPts val="0"/>
-              </a:spcAft>
-              <a:defRPr sz="1000">
-                <a:solidFill>
-                  <a:srgbClr val="26303E"/>
-                </a:solidFill>
-                <a:latin typeface="Aptos"/>
-              </a:defRPr>
-            </a:pPr>
-            <a:r>
-              <a:t>Добавьте на титульный слайд ФИО, группу и учебное заведение.</a:t>
             </a:r>
           </a:p>
         </p:txBody>
